--- a/slides/4-5_informed_consent/4-5_informed_consent.pptx
+++ b/slides/4-5_informed_consent/4-5_informed_consent.pptx
@@ -3248,7 +3248,7 @@
         </p:nvSpPr>
         <p:spPr>
           <a:xfrm>
-            <a:off x="594360" y="5194706"/>
+            <a:off x="594360" y="5171846"/>
             <a:ext cx="11000232" cy="365760"/>
           </a:xfrm>
           <a:prstGeom prst="rect">
@@ -3287,7 +3287,7 @@
         </p:nvSpPr>
         <p:spPr>
           <a:xfrm>
-            <a:off x="594360" y="5530291"/>
+            <a:off x="594360" y="5507431"/>
             <a:ext cx="11000232" cy="365760"/>
           </a:xfrm>
           <a:prstGeom prst="rect">
@@ -3327,7 +3327,7 @@
         <p:spPr>
           <a:xfrm>
             <a:off x="502920" y="1691640"/>
-            <a:ext cx="5481828" cy="3242462"/>
+            <a:ext cx="5342839" cy="3242462"/>
           </a:xfrm>
           <a:prstGeom prst="roundRect">
             <a:avLst>
@@ -3348,8 +3348,8 @@
         </p:nvSpPr>
         <p:spPr>
           <a:xfrm>
-            <a:off x="685800" y="1764792"/>
-            <a:ext cx="5116068" cy="402336"/>
+            <a:off x="670255" y="1764792"/>
+            <a:ext cx="5008169" cy="402336"/>
           </a:xfrm>
           <a:prstGeom prst="rect">
             <a:avLst/>
@@ -3387,8 +3387,8 @@
         </p:nvSpPr>
         <p:spPr>
           <a:xfrm>
-            <a:off x="685800" y="2167128"/>
-            <a:ext cx="5116068" cy="365760"/>
+            <a:off x="670255" y="2167128"/>
+            <a:ext cx="5008169" cy="365760"/>
           </a:xfrm>
           <a:prstGeom prst="rect">
             <a:avLst/>
@@ -3426,8 +3426,8 @@
         </p:nvSpPr>
         <p:spPr>
           <a:xfrm>
-            <a:off x="685800" y="2502713"/>
-            <a:ext cx="5116068" cy="365760"/>
+            <a:off x="949655" y="2502713"/>
+            <a:ext cx="4728769" cy="365760"/>
           </a:xfrm>
           <a:prstGeom prst="rect">
             <a:avLst/>
@@ -3465,8 +3465,8 @@
         </p:nvSpPr>
         <p:spPr>
           <a:xfrm>
-            <a:off x="685800" y="2924251"/>
-            <a:ext cx="5116068" cy="365760"/>
+            <a:off x="670255" y="2907792"/>
+            <a:ext cx="5008169" cy="365760"/>
           </a:xfrm>
           <a:prstGeom prst="rect">
             <a:avLst/>
@@ -3504,8 +3504,8 @@
         </p:nvSpPr>
         <p:spPr>
           <a:xfrm>
-            <a:off x="685800" y="3345790"/>
-            <a:ext cx="5116068" cy="365760"/>
+            <a:off x="670255" y="3312871"/>
+            <a:ext cx="5008169" cy="365760"/>
           </a:xfrm>
           <a:prstGeom prst="rect">
             <a:avLst/>
@@ -3543,8 +3543,8 @@
         </p:nvSpPr>
         <p:spPr>
           <a:xfrm>
-            <a:off x="685800" y="3681374"/>
-            <a:ext cx="5116068" cy="365760"/>
+            <a:off x="949655" y="3648456"/>
+            <a:ext cx="4728769" cy="365760"/>
           </a:xfrm>
           <a:prstGeom prst="rect">
             <a:avLst/>
@@ -3582,8 +3582,8 @@
         </p:nvSpPr>
         <p:spPr>
           <a:xfrm>
-            <a:off x="685800" y="4102913"/>
-            <a:ext cx="5116068" cy="365760"/>
+            <a:off x="670255" y="4053535"/>
+            <a:ext cx="5008169" cy="365760"/>
           </a:xfrm>
           <a:prstGeom prst="rect">
             <a:avLst/>
@@ -3621,8 +3621,8 @@
         </p:nvSpPr>
         <p:spPr>
           <a:xfrm>
-            <a:off x="685800" y="4524451"/>
-            <a:ext cx="5116068" cy="365760"/>
+            <a:off x="670255" y="4458614"/>
+            <a:ext cx="5008169" cy="365760"/>
           </a:xfrm>
           <a:prstGeom prst="rect">
             <a:avLst/>
@@ -3660,8 +3660,8 @@
         </p:nvSpPr>
         <p:spPr>
           <a:xfrm>
-            <a:off x="6204204" y="1691640"/>
-            <a:ext cx="5481828" cy="3242462"/>
+            <a:off x="6065215" y="1691640"/>
+            <a:ext cx="5621731" cy="3242462"/>
           </a:xfrm>
           <a:prstGeom prst="roundRect">
             <a:avLst>
@@ -3682,8 +3682,8 @@
         </p:nvSpPr>
         <p:spPr>
           <a:xfrm>
-            <a:off x="6387084" y="1764792"/>
-            <a:ext cx="5116068" cy="402336"/>
+            <a:off x="6232550" y="1764792"/>
+            <a:ext cx="5287061" cy="402336"/>
           </a:xfrm>
           <a:prstGeom prst="rect">
             <a:avLst/>
@@ -3721,8 +3721,8 @@
         </p:nvSpPr>
         <p:spPr>
           <a:xfrm>
-            <a:off x="6387084" y="2167128"/>
-            <a:ext cx="5116068" cy="365760"/>
+            <a:off x="6232550" y="2167128"/>
+            <a:ext cx="5287061" cy="365760"/>
           </a:xfrm>
           <a:prstGeom prst="rect">
             <a:avLst/>
@@ -3760,8 +3760,8 @@
         </p:nvSpPr>
         <p:spPr>
           <a:xfrm>
-            <a:off x="6387084" y="2502713"/>
-            <a:ext cx="5116068" cy="365760"/>
+            <a:off x="6511950" y="2502713"/>
+            <a:ext cx="5007661" cy="365760"/>
           </a:xfrm>
           <a:prstGeom prst="rect">
             <a:avLst/>
@@ -3799,8 +3799,8 @@
         </p:nvSpPr>
         <p:spPr>
           <a:xfrm>
-            <a:off x="6387084" y="2924251"/>
-            <a:ext cx="5116068" cy="365760"/>
+            <a:off x="6232550" y="2907792"/>
+            <a:ext cx="5287061" cy="365760"/>
           </a:xfrm>
           <a:prstGeom prst="rect">
             <a:avLst/>
@@ -3838,8 +3838,8 @@
         </p:nvSpPr>
         <p:spPr>
           <a:xfrm>
-            <a:off x="6387084" y="3259836"/>
-            <a:ext cx="5116068" cy="365760"/>
+            <a:off x="6511950" y="3243377"/>
+            <a:ext cx="5007661" cy="365760"/>
           </a:xfrm>
           <a:prstGeom prst="rect">
             <a:avLst/>
@@ -3877,8 +3877,8 @@
         </p:nvSpPr>
         <p:spPr>
           <a:xfrm>
-            <a:off x="6387084" y="3681374"/>
-            <a:ext cx="5116068" cy="365760"/>
+            <a:off x="6232550" y="3648456"/>
+            <a:ext cx="5287061" cy="365760"/>
           </a:xfrm>
           <a:prstGeom prst="rect">
             <a:avLst/>
@@ -3916,8 +3916,8 @@
         </p:nvSpPr>
         <p:spPr>
           <a:xfrm>
-            <a:off x="6387084" y="4016959"/>
-            <a:ext cx="5116068" cy="365760"/>
+            <a:off x="6511950" y="3984041"/>
+            <a:ext cx="5007661" cy="365760"/>
           </a:xfrm>
           <a:prstGeom prst="rect">
             <a:avLst/>
@@ -3955,8 +3955,8 @@
         </p:nvSpPr>
         <p:spPr>
           <a:xfrm>
-            <a:off x="6387084" y="4438498"/>
-            <a:ext cx="5116068" cy="365760"/>
+            <a:off x="6232550" y="4389120"/>
+            <a:ext cx="5287061" cy="365760"/>
           </a:xfrm>
           <a:prstGeom prst="rect">
             <a:avLst/>
@@ -4468,12 +4468,12 @@
         </p:nvSpPr>
         <p:spPr>
           <a:xfrm>
-            <a:off x="502920" y="5489143"/>
-            <a:ext cx="11183112" cy="417881"/>
+            <a:off x="502920" y="5404104"/>
+            <a:ext cx="11183112" cy="502920"/>
           </a:xfrm>
           <a:prstGeom prst="roundRect">
             <a:avLst>
-              <a:gd name="adj" fmla="val 21882"/>
+              <a:gd name="adj" fmla="val 18182"/>
             </a:avLst>
           </a:prstGeom>
           <a:solidFill>
@@ -4495,7 +4495,7 @@
         </p:nvSpPr>
         <p:spPr>
           <a:xfrm>
-            <a:off x="594360" y="5530291"/>
+            <a:off x="594360" y="5465369"/>
             <a:ext cx="11000232" cy="365760"/>
           </a:xfrm>
           <a:prstGeom prst="rect">
@@ -4535,11 +4535,11 @@
         <p:spPr>
           <a:xfrm>
             <a:off x="502920" y="1691640"/>
-            <a:ext cx="5325466" cy="3578047"/>
+            <a:ext cx="5186477" cy="3456432"/>
           </a:xfrm>
           <a:prstGeom prst="roundRect">
             <a:avLst>
-              <a:gd name="adj" fmla="val 2044"/>
+              <a:gd name="adj" fmla="val 2116"/>
             </a:avLst>
           </a:prstGeom>
           <a:solidFill>
@@ -4556,8 +4556,8 @@
         </p:nvSpPr>
         <p:spPr>
           <a:xfrm>
-            <a:off x="662026" y="1764792"/>
-            <a:ext cx="5007254" cy="402336"/>
+            <a:off x="591617" y="1764792"/>
+            <a:ext cx="5009083" cy="402336"/>
           </a:xfrm>
           <a:prstGeom prst="rect">
             <a:avLst/>
@@ -4595,8 +4595,8 @@
         </p:nvSpPr>
         <p:spPr>
           <a:xfrm>
-            <a:off x="662026" y="2167128"/>
-            <a:ext cx="5007254" cy="365760"/>
+            <a:off x="591617" y="2167128"/>
+            <a:ext cx="5009083" cy="365760"/>
           </a:xfrm>
           <a:prstGeom prst="rect">
             <a:avLst/>
@@ -4634,8 +4634,8 @@
         </p:nvSpPr>
         <p:spPr>
           <a:xfrm>
-            <a:off x="662026" y="2703881"/>
-            <a:ext cx="5007254" cy="365760"/>
+            <a:off x="591617" y="2667305"/>
+            <a:ext cx="5009083" cy="365760"/>
           </a:xfrm>
           <a:prstGeom prst="rect">
             <a:avLst/>
@@ -4673,8 +4673,8 @@
         </p:nvSpPr>
         <p:spPr>
           <a:xfrm>
-            <a:off x="662026" y="3240634"/>
-            <a:ext cx="5007254" cy="365760"/>
+            <a:off x="591617" y="3167482"/>
+            <a:ext cx="5009083" cy="365760"/>
           </a:xfrm>
           <a:prstGeom prst="rect">
             <a:avLst/>
@@ -4712,8 +4712,8 @@
         </p:nvSpPr>
         <p:spPr>
           <a:xfrm>
-            <a:off x="662026" y="3777386"/>
-            <a:ext cx="5007254" cy="365760"/>
+            <a:off x="591617" y="3667658"/>
+            <a:ext cx="5009083" cy="365760"/>
           </a:xfrm>
           <a:prstGeom prst="rect">
             <a:avLst/>
@@ -4751,8 +4751,8 @@
         </p:nvSpPr>
         <p:spPr>
           <a:xfrm>
-            <a:off x="662026" y="4112971"/>
-            <a:ext cx="5007254" cy="365760"/>
+            <a:off x="871017" y="4003243"/>
+            <a:ext cx="4729683" cy="365760"/>
           </a:xfrm>
           <a:prstGeom prst="rect">
             <a:avLst/>
@@ -4790,8 +4790,8 @@
         </p:nvSpPr>
         <p:spPr>
           <a:xfrm>
-            <a:off x="662026" y="4447642"/>
-            <a:ext cx="5007254" cy="365760"/>
+            <a:off x="731317" y="4337914"/>
+            <a:ext cx="4869383" cy="365760"/>
           </a:xfrm>
           <a:prstGeom prst="rect">
             <a:avLst/>
@@ -4829,12 +4829,12 @@
         </p:nvSpPr>
         <p:spPr>
           <a:xfrm>
-            <a:off x="6047842" y="1691640"/>
-            <a:ext cx="5638190" cy="3578047"/>
+            <a:off x="5908853" y="1691640"/>
+            <a:ext cx="5778094" cy="3456432"/>
           </a:xfrm>
           <a:prstGeom prst="roundRect">
             <a:avLst>
-              <a:gd name="adj" fmla="val 2044"/>
+              <a:gd name="adj" fmla="val 2116"/>
             </a:avLst>
           </a:prstGeom>
           <a:solidFill>
@@ -4851,8 +4851,8 @@
         </p:nvSpPr>
         <p:spPr>
           <a:xfrm>
-            <a:off x="6206947" y="1764792"/>
-            <a:ext cx="5319979" cy="402336"/>
+            <a:off x="5997550" y="1764792"/>
+            <a:ext cx="5600700" cy="402336"/>
           </a:xfrm>
           <a:prstGeom prst="rect">
             <a:avLst/>
@@ -4890,8 +4890,8 @@
         </p:nvSpPr>
         <p:spPr>
           <a:xfrm>
-            <a:off x="6206947" y="2167128"/>
-            <a:ext cx="5319979" cy="365760"/>
+            <a:off x="5997550" y="2167128"/>
+            <a:ext cx="5600700" cy="365760"/>
           </a:xfrm>
           <a:prstGeom prst="rect">
             <a:avLst/>
@@ -4940,8 +4940,8 @@
         </p:nvSpPr>
         <p:spPr>
           <a:xfrm>
-            <a:off x="6206947" y="2502713"/>
-            <a:ext cx="5319979" cy="365760"/>
+            <a:off x="6276950" y="2502713"/>
+            <a:ext cx="5321300" cy="365760"/>
           </a:xfrm>
           <a:prstGeom prst="rect">
             <a:avLst/>
@@ -4979,8 +4979,8 @@
         </p:nvSpPr>
         <p:spPr>
           <a:xfrm>
-            <a:off x="6206947" y="3039466"/>
-            <a:ext cx="5319979" cy="365760"/>
+            <a:off x="5997550" y="3002890"/>
+            <a:ext cx="5600700" cy="365760"/>
           </a:xfrm>
           <a:prstGeom prst="rect">
             <a:avLst/>
@@ -5029,8 +5029,8 @@
         </p:nvSpPr>
         <p:spPr>
           <a:xfrm>
-            <a:off x="6206947" y="3375050"/>
-            <a:ext cx="5319979" cy="365760"/>
+            <a:off x="6276950" y="3338474"/>
+            <a:ext cx="5321300" cy="365760"/>
           </a:xfrm>
           <a:prstGeom prst="rect">
             <a:avLst/>
@@ -5068,8 +5068,8 @@
         </p:nvSpPr>
         <p:spPr>
           <a:xfrm>
-            <a:off x="6206947" y="3911803"/>
-            <a:ext cx="5319979" cy="365760"/>
+            <a:off x="5997550" y="3838651"/>
+            <a:ext cx="5600700" cy="365760"/>
           </a:xfrm>
           <a:prstGeom prst="rect">
             <a:avLst/>
@@ -5107,8 +5107,8 @@
         </p:nvSpPr>
         <p:spPr>
           <a:xfrm>
-            <a:off x="6206947" y="4247388"/>
-            <a:ext cx="5319979" cy="365760"/>
+            <a:off x="6137250" y="4174236"/>
+            <a:ext cx="5461000" cy="365760"/>
           </a:xfrm>
           <a:prstGeom prst="rect">
             <a:avLst/>
@@ -5146,8 +5146,8 @@
         </p:nvSpPr>
         <p:spPr>
           <a:xfrm>
-            <a:off x="6206947" y="4784141"/>
-            <a:ext cx="5319979" cy="365760"/>
+            <a:off x="5997550" y="4674413"/>
+            <a:ext cx="5600700" cy="365760"/>
           </a:xfrm>
           <a:prstGeom prst="rect">
             <a:avLst/>
@@ -5666,7 +5666,7 @@
           </p:nvPr>
         </p:nvGraphicFramePr>
         <p:xfrm>
-          <a:off x="502920" y="1691640"/>
+          <a:off x="502920" y="1673352"/>
           <a:ext cx="11155680" cy="914400"/>
         </p:xfrm>
         <a:graphic>
@@ -5674,11 +5674,11 @@
             <a:tbl>
               <a:tblPr/>
               <a:tblGrid>
-                <a:gridCol w="4169664"/>
-                <a:gridCol w="4855464"/>
-                <a:gridCol w="2130552"/>
+                <a:gridCol w="3044952"/>
+                <a:gridCol w="5861304"/>
+                <a:gridCol w="2249424"/>
               </a:tblGrid>
-              <a:tr h="356616">
+              <a:tr h="361188">
                 <a:tc>
                   <a:txBody>
                     <a:bodyPr/>
@@ -5708,7 +5708,7 @@
                       </a:endParaRPr>
                     </a:p>
                   </a:txBody>
-                  <a:tcPr marL="50800" marR="50800" marT="12700" marB="6350" anchor="ctr">
+                  <a:tcPr marL="91440" marR="91440" marT="12700" marB="12700" anchor="ctr">
                     <a:lnL w="12700" cap="flat" cmpd="sng" algn="ctr">
                       <a:solidFill>
                         <a:srgbClr val="BFBFBF"/>
@@ -5779,7 +5779,7 @@
                       </a:endParaRPr>
                     </a:p>
                   </a:txBody>
-                  <a:tcPr marL="50800" marR="50800" marT="12700" marB="6350" anchor="ctr">
+                  <a:tcPr marL="91440" marR="91440" marT="12700" marB="12700" anchor="ctr">
                     <a:lnL w="12700" cap="flat" cmpd="sng" algn="ctr">
                       <a:solidFill>
                         <a:srgbClr val="BFBFBF"/>
@@ -5850,7 +5850,7 @@
                       </a:endParaRPr>
                     </a:p>
                   </a:txBody>
-                  <a:tcPr marL="50800" marR="50800" marT="12700" marB="6350" anchor="ctr">
+                  <a:tcPr marL="91440" marR="91440" marT="12700" marB="12700" anchor="ctr">
                     <a:lnL w="12700" cap="flat" cmpd="sng" algn="ctr">
                       <a:solidFill>
                         <a:srgbClr val="BFBFBF"/>
@@ -5893,7 +5893,7 @@
                   </a:tcPr>
                 </a:tc>
               </a:tr>
-              <a:tr h="356616">
+              <a:tr h="361188">
                 <a:tc>
                   <a:txBody>
                     <a:bodyPr/>
@@ -5923,7 +5923,7 @@
                       </a:endParaRPr>
                     </a:p>
                   </a:txBody>
-                  <a:tcPr marL="50800" marR="50800" marT="12700" marB="6350" anchor="ctr">
+                  <a:tcPr marL="91440" marR="91440" marT="12700" marB="12700" anchor="ctr">
                     <a:lnL w="12700" cap="flat" cmpd="sng" algn="ctr">
                       <a:solidFill>
                         <a:srgbClr val="BFBFBF"/>
@@ -5991,7 +5991,7 @@
                       </a:endParaRPr>
                     </a:p>
                   </a:txBody>
-                  <a:tcPr marL="50800" marR="50800" marT="12700" marB="6350" anchor="ctr">
+                  <a:tcPr marL="91440" marR="91440" marT="12700" marB="12700" anchor="ctr">
                     <a:lnL w="12700" cap="flat" cmpd="sng" algn="ctr">
                       <a:solidFill>
                         <a:srgbClr val="BFBFBF"/>
@@ -6059,7 +6059,7 @@
                       </a:endParaRPr>
                     </a:p>
                   </a:txBody>
-                  <a:tcPr marL="50800" marR="50800" marT="12700" marB="6350" anchor="ctr">
+                  <a:tcPr marL="91440" marR="91440" marT="12700" marB="12700" anchor="ctr">
                     <a:lnL w="12700" cap="flat" cmpd="sng" algn="ctr">
                       <a:solidFill>
                         <a:srgbClr val="BFBFBF"/>
@@ -6099,7 +6099,7 @@
                   </a:tcPr>
                 </a:tc>
               </a:tr>
-              <a:tr h="356616">
+              <a:tr h="361188">
                 <a:tc>
                   <a:txBody>
                     <a:bodyPr/>
@@ -6129,7 +6129,7 @@
                       </a:endParaRPr>
                     </a:p>
                   </a:txBody>
-                  <a:tcPr marL="50800" marR="50800" marT="12700" marB="6350" anchor="ctr">
+                  <a:tcPr marL="91440" marR="91440" marT="12700" marB="12700" anchor="ctr">
                     <a:lnL w="12700" cap="flat" cmpd="sng" algn="ctr">
                       <a:solidFill>
                         <a:srgbClr val="BFBFBF"/>
@@ -6197,7 +6197,7 @@
                       </a:endParaRPr>
                     </a:p>
                   </a:txBody>
-                  <a:tcPr marL="50800" marR="50800" marT="12700" marB="6350" anchor="ctr">
+                  <a:tcPr marL="91440" marR="91440" marT="12700" marB="12700" anchor="ctr">
                     <a:lnL w="12700" cap="flat" cmpd="sng" algn="ctr">
                       <a:solidFill>
                         <a:srgbClr val="BFBFBF"/>
@@ -6265,7 +6265,7 @@
                       </a:endParaRPr>
                     </a:p>
                   </a:txBody>
-                  <a:tcPr marL="50800" marR="50800" marT="12700" marB="6350" anchor="ctr">
+                  <a:tcPr marL="91440" marR="91440" marT="12700" marB="12700" anchor="ctr">
                     <a:lnL w="12700" cap="flat" cmpd="sng" algn="ctr">
                       <a:solidFill>
                         <a:srgbClr val="BFBFBF"/>
@@ -6305,7 +6305,7 @@
                   </a:tcPr>
                 </a:tc>
               </a:tr>
-              <a:tr h="694944">
+              <a:tr h="361188">
                 <a:tc>
                   <a:txBody>
                     <a:bodyPr/>
@@ -6326,7 +6326,7 @@
                           <a:ea typeface="メイリオ" pitchFamily="34" charset="-122"/>
                           <a:cs typeface="メイリオ" pitchFamily="34" charset="-120"/>
                         </a:rPr>
-                        <a:t>歯の損傷（処置が要るもの）</a:t>
+                        <a:t>歯の損傷（要処置）</a:t>
                       </a:r>
                       <a:endParaRPr lang="en-US" sz="2200" dirty="0">
                         <a:latin typeface="メイリオ" charset="0"/>
@@ -6335,7 +6335,7 @@
                       </a:endParaRPr>
                     </a:p>
                   </a:txBody>
-                  <a:tcPr marL="50800" marR="50800" marT="12700" marB="6350" anchor="ctr">
+                  <a:tcPr marL="91440" marR="91440" marT="12700" marB="12700" anchor="ctr">
                     <a:lnL w="12700" cap="flat" cmpd="sng" algn="ctr">
                       <a:solidFill>
                         <a:srgbClr val="BFBFBF"/>
@@ -6394,31 +6394,7 @@
                           <a:ea typeface="メイリオ" pitchFamily="34" charset="-122"/>
                           <a:cs typeface="メイリオ" pitchFamily="34" charset="-120"/>
                         </a:rPr>
-                        <a:t>約 1/4,500。</a:t>
-                      </a:r>
-                      <a:endParaRPr lang="en-US" sz="2200" dirty="0">
-                        <a:latin typeface="メイリオ" charset="0"/>
-                        <a:ea typeface="メイリオ" charset="0"/>
-                        <a:cs typeface="メイリオ" charset="0"/>
-                      </a:endParaRPr>
-                    </a:p>
-                    <a:p>
-                      <a:pPr algn="l" indent="0" marL="0">
-                        <a:lnSpc>
-                          <a:spcPts val="2640"/>
-                        </a:lnSpc>
-                        <a:buNone/>
-                      </a:pPr>
-                      <a:r>
-                        <a:rPr lang="ja-JP" altLang="en-US" sz="2200" dirty="0">
-                          <a:solidFill>
-                            <a:srgbClr val="262626"/>
-                          </a:solidFill>
-                          <a:latin typeface="メイリオ" pitchFamily="34" charset="0"/>
-                          <a:ea typeface="メイリオ" pitchFamily="34" charset="-122"/>
-                          <a:cs typeface="メイリオ" pitchFamily="34" charset="-120"/>
-                        </a:rPr>
-                        <a:t>歯が悪いとオッズ比 50</a:t>
+                        <a:t>約 1/4,500。歯が悪いとオッズ比 50</a:t>
                       </a:r>
                       <a:endParaRPr lang="en-US" sz="2200" dirty="0">
                         <a:latin typeface="メイリオ" charset="0"/>
@@ -6427,7 +6403,7 @@
                       </a:endParaRPr>
                     </a:p>
                   </a:txBody>
-                  <a:tcPr marL="50800" marR="50800" marT="12700" marB="6350" anchor="ctr">
+                  <a:tcPr marL="91440" marR="91440" marT="12700" marB="12700" anchor="ctr">
                     <a:lnL w="12700" cap="flat" cmpd="sng" algn="ctr">
                       <a:solidFill>
                         <a:srgbClr val="BFBFBF"/>
@@ -6495,7 +6471,7 @@
                       </a:endParaRPr>
                     </a:p>
                   </a:txBody>
-                  <a:tcPr marL="50800" marR="50800" marT="12700" marB="6350" anchor="ctr">
+                  <a:tcPr marL="91440" marR="91440" marT="12700" marB="12700" anchor="ctr">
                     <a:lnL w="12700" cap="flat" cmpd="sng" algn="ctr">
                       <a:solidFill>
                         <a:srgbClr val="BFBFBF"/>
@@ -6535,7 +6511,7 @@
                   </a:tcPr>
                 </a:tc>
               </a:tr>
-              <a:tr h="694944">
+              <a:tr h="696773">
                 <a:tc>
                   <a:txBody>
                     <a:bodyPr/>
@@ -6556,7 +6532,31 @@
                           <a:ea typeface="メイリオ" pitchFamily="34" charset="-122"/>
                           <a:cs typeface="メイリオ" pitchFamily="34" charset="-120"/>
                         </a:rPr>
-                        <a:t>硬膜穿刺後頭痛（産婦）</a:t>
+                        <a:t>硬膜穿刺後頭痛</a:t>
+                      </a:r>
+                      <a:endParaRPr lang="en-US" sz="2200" dirty="0">
+                        <a:latin typeface="メイリオ" charset="0"/>
+                        <a:ea typeface="メイリオ" charset="0"/>
+                        <a:cs typeface="メイリオ" charset="0"/>
+                      </a:endParaRPr>
+                    </a:p>
+                    <a:p>
+                      <a:pPr algn="l" indent="0" marL="0">
+                        <a:lnSpc>
+                          <a:spcPts val="2640"/>
+                        </a:lnSpc>
+                        <a:buNone/>
+                      </a:pPr>
+                      <a:r>
+                        <a:rPr lang="ja-JP" altLang="en-US" sz="2200" dirty="0">
+                          <a:solidFill>
+                            <a:srgbClr val="262626"/>
+                          </a:solidFill>
+                          <a:latin typeface="メイリオ" pitchFamily="34" charset="0"/>
+                          <a:ea typeface="メイリオ" pitchFamily="34" charset="-122"/>
+                          <a:cs typeface="メイリオ" pitchFamily="34" charset="-120"/>
+                        </a:rPr>
+                        <a:t>（産婦）</a:t>
                       </a:r>
                       <a:endParaRPr lang="en-US" sz="2200" dirty="0">
                         <a:latin typeface="メイリオ" charset="0"/>
@@ -6565,7 +6565,7 @@
                       </a:endParaRPr>
                     </a:p>
                   </a:txBody>
-                  <a:tcPr marL="50800" marR="50800" marT="12700" marB="6350" anchor="ctr">
+                  <a:tcPr marL="91440" marR="91440" marT="12700" marB="12700" anchor="ctr">
                     <a:lnL w="12700" cap="flat" cmpd="sng" algn="ctr">
                       <a:solidFill>
                         <a:srgbClr val="BFBFBF"/>
@@ -6657,7 +6657,7 @@
                       </a:endParaRPr>
                     </a:p>
                   </a:txBody>
-                  <a:tcPr marL="50800" marR="50800" marT="12700" marB="6350" anchor="ctr">
+                  <a:tcPr marL="91440" marR="91440" marT="12700" marB="12700" anchor="ctr">
                     <a:lnL w="12700" cap="flat" cmpd="sng" algn="ctr">
                       <a:solidFill>
                         <a:srgbClr val="BFBFBF"/>
@@ -6725,7 +6725,7 @@
                       </a:endParaRPr>
                     </a:p>
                   </a:txBody>
-                  <a:tcPr marL="50800" marR="50800" marT="12700" marB="6350" anchor="ctr">
+                  <a:tcPr marL="91440" marR="91440" marT="12700" marB="12700" anchor="ctr">
                     <a:lnL w="12700" cap="flat" cmpd="sng" algn="ctr">
                       <a:solidFill>
                         <a:srgbClr val="BFBFBF"/>
@@ -6765,7 +6765,7 @@
                   </a:tcPr>
                 </a:tc>
               </a:tr>
-              <a:tr h="694944">
+              <a:tr h="696773">
                 <a:tc>
                   <a:txBody>
                     <a:bodyPr/>
@@ -6795,7 +6795,7 @@
                       </a:endParaRPr>
                     </a:p>
                   </a:txBody>
-                  <a:tcPr marL="50800" marR="50800" marT="12700" marB="6350" anchor="ctr">
+                  <a:tcPr marL="91440" marR="91440" marT="12700" marB="12700" anchor="ctr">
                     <a:lnL w="12700" cap="flat" cmpd="sng" algn="ctr">
                       <a:solidFill>
                         <a:srgbClr val="BFBFBF"/>
@@ -6854,7 +6854,7 @@
                           <a:ea typeface="メイリオ" pitchFamily="34" charset="-122"/>
                           <a:cs typeface="メイリオ" pitchFamily="34" charset="-120"/>
                         </a:rPr>
-                        <a:t>約 1/19,600（筋弛緩薬使用</a:t>
+                        <a:t>約 1/19,600（筋弛緩薬使用 1/8,200、</a:t>
                       </a:r>
                       <a:endParaRPr lang="en-US" sz="2200" dirty="0">
                         <a:latin typeface="メイリオ" charset="0"/>
@@ -6878,7 +6878,7 @@
                           <a:ea typeface="メイリオ" pitchFamily="34" charset="-122"/>
                           <a:cs typeface="メイリオ" pitchFamily="34" charset="-120"/>
                         </a:rPr>
-                        <a:t>1/8,200、帝王切開 1/670）</a:t>
+                        <a:t>帝王切開 1/670）</a:t>
                       </a:r>
                       <a:endParaRPr lang="en-US" sz="2200" dirty="0">
                         <a:latin typeface="メイリオ" charset="0"/>
@@ -6887,7 +6887,7 @@
                       </a:endParaRPr>
                     </a:p>
                   </a:txBody>
-                  <a:tcPr marL="50800" marR="50800" marT="12700" marB="6350" anchor="ctr">
+                  <a:tcPr marL="91440" marR="91440" marT="12700" marB="12700" anchor="ctr">
                     <a:lnL w="12700" cap="flat" cmpd="sng" algn="ctr">
                       <a:solidFill>
                         <a:srgbClr val="BFBFBF"/>
@@ -6955,7 +6955,7 @@
                       </a:endParaRPr>
                     </a:p>
                   </a:txBody>
-                  <a:tcPr marL="50800" marR="50800" marT="12700" marB="6350" anchor="ctr">
+                  <a:tcPr marL="91440" marR="91440" marT="12700" marB="12700" anchor="ctr">
                     <a:lnL w="12700" cap="flat" cmpd="sng" algn="ctr">
                       <a:solidFill>
                         <a:srgbClr val="BFBFBF"/>
@@ -6995,7 +6995,7 @@
                   </a:tcPr>
                 </a:tc>
               </a:tr>
-              <a:tr h="356616">
+              <a:tr h="696773">
                 <a:tc>
                   <a:txBody>
                     <a:bodyPr/>
@@ -7016,7 +7016,31 @@
                           <a:ea typeface="メイリオ" pitchFamily="34" charset="-122"/>
                           <a:cs typeface="メイリオ" pitchFamily="34" charset="-120"/>
                         </a:rPr>
-                        <a:t>脊麻・硬膜外の永続的な障害</a:t>
+                        <a:t>脊麻・硬膜外の</a:t>
+                      </a:r>
+                      <a:endParaRPr lang="en-US" sz="2200" dirty="0">
+                        <a:latin typeface="メイリオ" charset="0"/>
+                        <a:ea typeface="メイリオ" charset="0"/>
+                        <a:cs typeface="メイリオ" charset="0"/>
+                      </a:endParaRPr>
+                    </a:p>
+                    <a:p>
+                      <a:pPr algn="l" indent="0" marL="0">
+                        <a:lnSpc>
+                          <a:spcPts val="2640"/>
+                        </a:lnSpc>
+                        <a:buNone/>
+                      </a:pPr>
+                      <a:r>
+                        <a:rPr lang="ja-JP" altLang="en-US" sz="2200" dirty="0">
+                          <a:solidFill>
+                            <a:srgbClr val="262626"/>
+                          </a:solidFill>
+                          <a:latin typeface="メイリオ" pitchFamily="34" charset="0"/>
+                          <a:ea typeface="メイリオ" pitchFamily="34" charset="-122"/>
+                          <a:cs typeface="メイリオ" pitchFamily="34" charset="-120"/>
+                        </a:rPr>
+                        <a:t>永続的な障害</a:t>
                       </a:r>
                       <a:endParaRPr lang="en-US" sz="2200" dirty="0">
                         <a:latin typeface="メイリオ" charset="0"/>
@@ -7025,7 +7049,7 @@
                       </a:endParaRPr>
                     </a:p>
                   </a:txBody>
-                  <a:tcPr marL="50800" marR="50800" marT="12700" marB="6350" anchor="ctr">
+                  <a:tcPr marL="91440" marR="91440" marT="12700" marB="12700" anchor="ctr">
                     <a:lnL w="12700" cap="flat" cmpd="sng" algn="ctr">
                       <a:solidFill>
                         <a:srgbClr val="BFBFBF"/>
@@ -7093,7 +7117,7 @@
                       </a:endParaRPr>
                     </a:p>
                   </a:txBody>
-                  <a:tcPr marL="50800" marR="50800" marT="12700" marB="6350" anchor="ctr">
+                  <a:tcPr marL="91440" marR="91440" marT="12700" marB="12700" anchor="ctr">
                     <a:lnL w="12700" cap="flat" cmpd="sng" algn="ctr">
                       <a:solidFill>
                         <a:srgbClr val="BFBFBF"/>
@@ -7161,7 +7185,7 @@
                       </a:endParaRPr>
                     </a:p>
                   </a:txBody>
-                  <a:tcPr marL="50800" marR="50800" marT="12700" marB="6350" anchor="ctr">
+                  <a:tcPr marL="91440" marR="91440" marT="12700" marB="12700" anchor="ctr">
                     <a:lnL w="12700" cap="flat" cmpd="sng" algn="ctr">
                       <a:solidFill>
                         <a:srgbClr val="BFBFBF"/>
@@ -7201,7 +7225,7 @@
                   </a:tcPr>
                 </a:tc>
               </a:tr>
-              <a:tr h="694944">
+              <a:tr h="696773">
                 <a:tc>
                   <a:txBody>
                     <a:bodyPr/>
@@ -7222,7 +7246,31 @@
                           <a:ea typeface="メイリオ" pitchFamily="34" charset="-122"/>
                           <a:cs typeface="メイリオ" pitchFamily="34" charset="-120"/>
                         </a:rPr>
-                        <a:t>麻酔が単独の原因の死亡</a:t>
+                        <a:t>麻酔が単独の</a:t>
+                      </a:r>
+                      <a:endParaRPr lang="en-US" sz="2200" dirty="0">
+                        <a:latin typeface="メイリオ" charset="0"/>
+                        <a:ea typeface="メイリオ" charset="0"/>
+                        <a:cs typeface="メイリオ" charset="0"/>
+                      </a:endParaRPr>
+                    </a:p>
+                    <a:p>
+                      <a:pPr algn="l" indent="0" marL="0">
+                        <a:lnSpc>
+                          <a:spcPts val="2640"/>
+                        </a:lnSpc>
+                        <a:buNone/>
+                      </a:pPr>
+                      <a:r>
+                        <a:rPr lang="ja-JP" altLang="en-US" sz="2200" dirty="0">
+                          <a:solidFill>
+                            <a:srgbClr val="262626"/>
+                          </a:solidFill>
+                          <a:latin typeface="メイリオ" pitchFamily="34" charset="0"/>
+                          <a:ea typeface="メイリオ" pitchFamily="34" charset="-122"/>
+                          <a:cs typeface="メイリオ" pitchFamily="34" charset="-120"/>
+                        </a:rPr>
+                        <a:t>原因の死亡</a:t>
                       </a:r>
                       <a:endParaRPr lang="en-US" sz="2200" dirty="0">
                         <a:latin typeface="メイリオ" charset="0"/>
@@ -7231,7 +7279,7 @@
                       </a:endParaRPr>
                     </a:p>
                   </a:txBody>
-                  <a:tcPr marL="50800" marR="50800" marT="12700" marB="6350" anchor="ctr">
+                  <a:tcPr marL="91440" marR="91440" marT="12700" marB="12700" anchor="ctr">
                     <a:lnL w="12700" cap="flat" cmpd="sng" algn="ctr">
                       <a:solidFill>
                         <a:srgbClr val="BFBFBF"/>
@@ -7323,7 +7371,7 @@
                       </a:endParaRPr>
                     </a:p>
                   </a:txBody>
-                  <a:tcPr marL="50800" marR="50800" marT="12700" marB="6350" anchor="ctr">
+                  <a:tcPr marL="91440" marR="91440" marT="12700" marB="12700" anchor="ctr">
                     <a:lnL w="12700" cap="flat" cmpd="sng" algn="ctr">
                       <a:solidFill>
                         <a:srgbClr val="BFBFBF"/>
@@ -7415,7 +7463,7 @@
                       </a:endParaRPr>
                     </a:p>
                   </a:txBody>
-                  <a:tcPr marL="50800" marR="50800" marT="12700" marB="6350" anchor="ctr">
+                  <a:tcPr marL="91440" marR="91440" marT="12700" marB="12700" anchor="ctr">
                     <a:lnL w="12700" cap="flat" cmpd="sng" algn="ctr">
                       <a:solidFill>
                         <a:srgbClr val="BFBFBF"/>
@@ -7968,7 +8016,7 @@
         </p:nvSpPr>
         <p:spPr>
           <a:xfrm>
-            <a:off x="594360" y="5194706"/>
+            <a:off x="594360" y="5171846"/>
             <a:ext cx="11000232" cy="365760"/>
           </a:xfrm>
           <a:prstGeom prst="rect">
@@ -8007,7 +8055,7 @@
         </p:nvSpPr>
         <p:spPr>
           <a:xfrm>
-            <a:off x="594360" y="5530291"/>
+            <a:off x="594360" y="5507431"/>
             <a:ext cx="11000232" cy="365760"/>
           </a:xfrm>
           <a:prstGeom prst="rect">
@@ -8146,7 +8194,7 @@
         </p:nvSpPr>
         <p:spPr>
           <a:xfrm>
-            <a:off x="587045" y="2588666"/>
+            <a:off x="587045" y="2537460"/>
             <a:ext cx="4068166" cy="365760"/>
           </a:xfrm>
           <a:prstGeom prst="rect">
@@ -8185,7 +8233,7 @@
         </p:nvSpPr>
         <p:spPr>
           <a:xfrm>
-            <a:off x="587045" y="3010205"/>
+            <a:off x="587045" y="2907792"/>
             <a:ext cx="4068166" cy="365760"/>
           </a:xfrm>
           <a:prstGeom prst="rect">
@@ -8224,7 +8272,7 @@
         </p:nvSpPr>
         <p:spPr>
           <a:xfrm>
-            <a:off x="587045" y="3431743"/>
+            <a:off x="587045" y="3278124"/>
             <a:ext cx="4068166" cy="365760"/>
           </a:xfrm>
           <a:prstGeom prst="rect">
@@ -8263,7 +8311,7 @@
         </p:nvSpPr>
         <p:spPr>
           <a:xfrm>
-            <a:off x="587045" y="3853282"/>
+            <a:off x="587045" y="3787445"/>
             <a:ext cx="4068166" cy="365760"/>
           </a:xfrm>
           <a:prstGeom prst="rect">
@@ -8302,7 +8350,7 @@
         </p:nvSpPr>
         <p:spPr>
           <a:xfrm>
-            <a:off x="587045" y="4188866"/>
+            <a:off x="587045" y="4123030"/>
             <a:ext cx="4068166" cy="365760"/>
           </a:xfrm>
           <a:prstGeom prst="rect">
@@ -8341,7 +8389,7 @@
         </p:nvSpPr>
         <p:spPr>
           <a:xfrm>
-            <a:off x="587045" y="4523537"/>
+            <a:off x="587045" y="4457700"/>
             <a:ext cx="4068166" cy="365760"/>
           </a:xfrm>
           <a:prstGeom prst="rect">
@@ -8381,7 +8429,7 @@
         <p:spPr>
           <a:xfrm>
             <a:off x="4958791" y="1691640"/>
-            <a:ext cx="6727241" cy="3242462"/>
+            <a:ext cx="6728155" cy="3242462"/>
           </a:xfrm>
           <a:prstGeom prst="roundRect">
             <a:avLst>
@@ -8403,7 +8451,7 @@
         <p:spPr>
           <a:xfrm>
             <a:off x="5042916" y="1764792"/>
-            <a:ext cx="6558991" cy="402336"/>
+            <a:ext cx="6559906" cy="402336"/>
           </a:xfrm>
           <a:prstGeom prst="rect">
             <a:avLst/>
@@ -8442,7 +8490,7 @@
         <p:spPr>
           <a:xfrm>
             <a:off x="5042916" y="2167128"/>
-            <a:ext cx="6558991" cy="365760"/>
+            <a:ext cx="6559906" cy="365760"/>
           </a:xfrm>
           <a:prstGeom prst="rect">
             <a:avLst/>
@@ -8480,8 +8528,8 @@
         </p:nvSpPr>
         <p:spPr>
           <a:xfrm>
-            <a:off x="5042916" y="2588666"/>
-            <a:ext cx="6558991" cy="365760"/>
+            <a:off x="5042916" y="2572207"/>
+            <a:ext cx="6559906" cy="365760"/>
           </a:xfrm>
           <a:prstGeom prst="rect">
             <a:avLst/>
@@ -8519,8 +8567,8 @@
         </p:nvSpPr>
         <p:spPr>
           <a:xfrm>
-            <a:off x="5042916" y="2924251"/>
-            <a:ext cx="6558991" cy="365760"/>
+            <a:off x="5182616" y="2907792"/>
+            <a:ext cx="6420206" cy="365760"/>
           </a:xfrm>
           <a:prstGeom prst="rect">
             <a:avLst/>
@@ -8558,8 +8606,8 @@
         </p:nvSpPr>
         <p:spPr>
           <a:xfrm>
-            <a:off x="5042916" y="3345790"/>
-            <a:ext cx="6558991" cy="365760"/>
+            <a:off x="5042916" y="3312871"/>
+            <a:ext cx="6559906" cy="365760"/>
           </a:xfrm>
           <a:prstGeom prst="rect">
             <a:avLst/>
@@ -8597,8 +8645,8 @@
         </p:nvSpPr>
         <p:spPr>
           <a:xfrm>
-            <a:off x="5042916" y="3767328"/>
-            <a:ext cx="6558991" cy="365760"/>
+            <a:off x="5042916" y="3717950"/>
+            <a:ext cx="6559906" cy="365760"/>
           </a:xfrm>
           <a:prstGeom prst="rect">
             <a:avLst/>
@@ -8636,8 +8684,8 @@
         </p:nvSpPr>
         <p:spPr>
           <a:xfrm>
-            <a:off x="5042916" y="4102913"/>
-            <a:ext cx="6558991" cy="365760"/>
+            <a:off x="5322316" y="4053535"/>
+            <a:ext cx="6280506" cy="365760"/>
           </a:xfrm>
           <a:prstGeom prst="rect">
             <a:avLst/>
@@ -8675,8 +8723,8 @@
         </p:nvSpPr>
         <p:spPr>
           <a:xfrm>
-            <a:off x="5042916" y="4524451"/>
-            <a:ext cx="6558991" cy="365760"/>
+            <a:off x="5042916" y="4458614"/>
+            <a:ext cx="6559906" cy="365760"/>
           </a:xfrm>
           <a:prstGeom prst="rect">
             <a:avLst/>
